--- a/deep_learning/4_transformers_deploy/modern_NLP_transformers_intro/0_attention_concept.pptx
+++ b/deep_learning/4_transformers_deploy/modern_NLP_transformers_intro/0_attention_concept.pptx
@@ -218,7 +218,7 @@
           <a:p>
             <a:fld id="{7BAEECA8-D063-486F-AE31-5020270C1449}" type="datetimeFigureOut">
               <a:rPr lang="en-US" smtClean="0"/>
-              <a:t>5/2/2026</a:t>
+              <a:t>6/15/2026</a:t>
             </a:fld>
             <a:endParaRPr lang="en-US"/>
           </a:p>
@@ -395,7 +395,7 @@
           <a:p>
             <a:fld id="{CB233BD1-3BA8-448D-9D08-7846095EA517}" type="datetimeFigureOut">
               <a:rPr lang="en-US" smtClean="0"/>
-              <a:t>5/2/2026</a:t>
+              <a:t>6/15/2026</a:t>
             </a:fld>
             <a:endParaRPr lang="en-US"/>
           </a:p>
@@ -809,7 +809,7 @@
           <a:p>
             <a:fld id="{6383FAE1-13DE-4511-8C1B-C8AFB720664C}" type="datetimeFigureOut">
               <a:rPr lang="en-US" smtClean="0"/>
-              <a:t>5/2/2026</a:t>
+              <a:t>6/15/2026</a:t>
             </a:fld>
             <a:endParaRPr lang="en-US"/>
           </a:p>
@@ -1007,7 +1007,7 @@
           <a:p>
             <a:fld id="{6383FAE1-13DE-4511-8C1B-C8AFB720664C}" type="datetimeFigureOut">
               <a:rPr lang="en-US" smtClean="0"/>
-              <a:t>5/2/2026</a:t>
+              <a:t>6/15/2026</a:t>
             </a:fld>
             <a:endParaRPr lang="en-US"/>
           </a:p>
@@ -1215,7 +1215,7 @@
           <a:p>
             <a:fld id="{6383FAE1-13DE-4511-8C1B-C8AFB720664C}" type="datetimeFigureOut">
               <a:rPr lang="en-US" smtClean="0"/>
-              <a:t>5/2/2026</a:t>
+              <a:t>6/15/2026</a:t>
             </a:fld>
             <a:endParaRPr lang="en-US"/>
           </a:p>
@@ -1413,7 +1413,7 @@
           <a:p>
             <a:fld id="{6383FAE1-13DE-4511-8C1B-C8AFB720664C}" type="datetimeFigureOut">
               <a:rPr lang="en-US" smtClean="0"/>
-              <a:t>5/2/2026</a:t>
+              <a:t>6/15/2026</a:t>
             </a:fld>
             <a:endParaRPr lang="en-US"/>
           </a:p>
@@ -1688,7 +1688,7 @@
           <a:p>
             <a:fld id="{6383FAE1-13DE-4511-8C1B-C8AFB720664C}" type="datetimeFigureOut">
               <a:rPr lang="en-US" smtClean="0"/>
-              <a:t>5/2/2026</a:t>
+              <a:t>6/15/2026</a:t>
             </a:fld>
             <a:endParaRPr lang="en-US"/>
           </a:p>
@@ -1953,7 +1953,7 @@
           <a:p>
             <a:fld id="{6383FAE1-13DE-4511-8C1B-C8AFB720664C}" type="datetimeFigureOut">
               <a:rPr lang="en-US" smtClean="0"/>
-              <a:t>5/2/2026</a:t>
+              <a:t>6/15/2026</a:t>
             </a:fld>
             <a:endParaRPr lang="en-US"/>
           </a:p>
@@ -2365,7 +2365,7 @@
           <a:p>
             <a:fld id="{6383FAE1-13DE-4511-8C1B-C8AFB720664C}" type="datetimeFigureOut">
               <a:rPr lang="en-US" smtClean="0"/>
-              <a:t>5/2/2026</a:t>
+              <a:t>6/15/2026</a:t>
             </a:fld>
             <a:endParaRPr lang="en-US"/>
           </a:p>
@@ -2506,7 +2506,7 @@
           <a:p>
             <a:fld id="{6383FAE1-13DE-4511-8C1B-C8AFB720664C}" type="datetimeFigureOut">
               <a:rPr lang="en-US" smtClean="0"/>
-              <a:t>5/2/2026</a:t>
+              <a:t>6/15/2026</a:t>
             </a:fld>
             <a:endParaRPr lang="en-US"/>
           </a:p>
@@ -2619,7 +2619,7 @@
           <a:p>
             <a:fld id="{6383FAE1-13DE-4511-8C1B-C8AFB720664C}" type="datetimeFigureOut">
               <a:rPr lang="en-US" smtClean="0"/>
-              <a:t>5/2/2026</a:t>
+              <a:t>6/15/2026</a:t>
             </a:fld>
             <a:endParaRPr lang="en-US"/>
           </a:p>
@@ -2930,7 +2930,7 @@
           <a:p>
             <a:fld id="{6383FAE1-13DE-4511-8C1B-C8AFB720664C}" type="datetimeFigureOut">
               <a:rPr lang="en-US" smtClean="0"/>
-              <a:t>5/2/2026</a:t>
+              <a:t>6/15/2026</a:t>
             </a:fld>
             <a:endParaRPr lang="en-US"/>
           </a:p>
@@ -3221,7 +3221,7 @@
           <a:p>
             <a:fld id="{6383FAE1-13DE-4511-8C1B-C8AFB720664C}" type="datetimeFigureOut">
               <a:rPr lang="en-US" smtClean="0"/>
-              <a:t>5/2/2026</a:t>
+              <a:t>6/15/2026</a:t>
             </a:fld>
             <a:endParaRPr lang="en-US"/>
           </a:p>
@@ -3465,7 +3465,7 @@
           <a:p>
             <a:fld id="{6383FAE1-13DE-4511-8C1B-C8AFB720664C}" type="datetimeFigureOut">
               <a:rPr lang="en-US" smtClean="0"/>
-              <a:t>5/2/2026</a:t>
+              <a:t>6/15/2026</a:t>
             </a:fld>
             <a:endParaRPr lang="en-US"/>
           </a:p>
@@ -4068,7 +4068,7 @@
         </p:nvSpPr>
         <p:spPr>
           <a:xfrm>
-            <a:off x="310896" y="65776"/>
+            <a:off x="402336" y="612844"/>
             <a:ext cx="10524744" cy="5632311"/>
           </a:xfrm>
           <a:prstGeom prst="rect">
